--- a/dataset/guides_final/SEC/guide/IT-SEC-003_계정 도용·장비 분실 신고 가이드.pptx
+++ b/dataset/guides_final/SEC/guide/IT-SEC-003_계정 도용·장비 분실 신고 가이드.pptx
@@ -3246,7 +3246,7 @@
                 <a:ea typeface="Malgun Gothic"/>
                 <a:cs typeface="Malgun Gothic"/>
               </a:rPr>
-              <a:t>한화시스템 ICT 임직원 IT 안내 · 정보보안</a:t>
+              <a:t>가상 ICT 기업 임직원 IT 안내 · 정보보안</a:t>
             </a:r>
           </a:p>
         </p:txBody>
@@ -3478,7 +3478,7 @@
                 <a:ea typeface="Malgun Gothic"/>
                 <a:cs typeface="Malgun Gothic"/>
               </a:rPr>
-              <a:t>© HANWHA SYSTEMS ICT · IT-SEC-003 · 사내 일반</a:t>
+              <a:t>© 가상 ICT 기업 · IT-SEC-003 · 사내 일반</a:t>
             </a:r>
           </a:p>
         </p:txBody>
@@ -6006,7 +6006,7 @@
                 <a:ea typeface="Malgun Gothic"/>
                 <a:cs typeface="Malgun Gothic"/>
               </a:rPr>
-              <a:t>© HANWHA SYSTEMS ICT · IT-SEC-003 · 사내 일반</a:t>
+              <a:t>© 가상 ICT 기업 · IT-SEC-003 · 사내 일반</a:t>
             </a:r>
           </a:p>
         </p:txBody>
@@ -8073,7 +8073,7 @@
                 <a:ea typeface="Malgun Gothic"/>
                 <a:cs typeface="Malgun Gothic"/>
               </a:rPr>
-              <a:t>© HANWHA SYSTEMS ICT · IT-SEC-003 · 사내 일반</a:t>
+              <a:t>© 가상 ICT 기업 · IT-SEC-003 · 사내 일반</a:t>
             </a:r>
           </a:p>
         </p:txBody>
@@ -9647,7 +9647,7 @@
                 <a:ea typeface="Malgun Gothic"/>
                 <a:cs typeface="Malgun Gothic"/>
               </a:rPr>
-              <a:t>© HANWHA SYSTEMS ICT · IT-SEC-003 · 사내 일반</a:t>
+              <a:t>© 가상 ICT 기업 · IT-SEC-003 · 사내 일반</a:t>
             </a:r>
           </a:p>
         </p:txBody>
@@ -11688,7 +11688,7 @@
                 <a:ea typeface="Malgun Gothic"/>
                 <a:cs typeface="Malgun Gothic"/>
               </a:rPr>
-              <a:t>© HANWHA SYSTEMS ICT · IT-SEC-003 · 사내 일반</a:t>
+              <a:t>© 가상 ICT 기업 · IT-SEC-003 · 사내 일반</a:t>
             </a:r>
           </a:p>
         </p:txBody>
@@ -13238,7 +13238,7 @@
                 <a:ea typeface="Malgun Gothic"/>
                 <a:cs typeface="Malgun Gothic"/>
               </a:rPr>
-              <a:t>© HANWHA SYSTEMS ICT · IT-SEC-003 · 사내 일반</a:t>
+              <a:t>© 가상 ICT 기업 · IT-SEC-003 · 사내 일반</a:t>
             </a:r>
           </a:p>
         </p:txBody>
@@ -15268,7 +15268,7 @@
                 <a:ea typeface="Malgun Gothic"/>
                 <a:cs typeface="Malgun Gothic"/>
               </a:rPr>
-              <a:t>© HANWHA SYSTEMS ICT · IT-SEC-003 · 사내 일반</a:t>
+              <a:t>© 가상 ICT 기업 · IT-SEC-003 · 사내 일반</a:t>
             </a:r>
           </a:p>
         </p:txBody>
@@ -16769,7 +16769,7 @@
                 <a:ea typeface="Malgun Gothic"/>
                 <a:cs typeface="Malgun Gothic"/>
               </a:rPr>
-              <a:t>© HANWHA SYSTEMS ICT · IT-SEC-003 · 사내 일반</a:t>
+              <a:t>© 가상 ICT 기업 · IT-SEC-003 · 사내 일반</a:t>
             </a:r>
           </a:p>
         </p:txBody>
@@ -18976,7 +18976,7 @@
                 <a:ea typeface="Malgun Gothic"/>
                 <a:cs typeface="Malgun Gothic"/>
               </a:rPr>
-              <a:t>© HANWHA SYSTEMS ICT · IT-SEC-003 · 사내 일반</a:t>
+              <a:t>© 가상 ICT 기업 · IT-SEC-003 · 사내 일반</a:t>
             </a:r>
           </a:p>
         </p:txBody>
@@ -20501,7 +20501,7 @@
                 <a:ea typeface="Malgun Gothic"/>
                 <a:cs typeface="Malgun Gothic"/>
               </a:rPr>
-              <a:t>© HANWHA SYSTEMS ICT · IT-SEC-003 · 사내 일반</a:t>
+              <a:t>© 가상 ICT 기업 · IT-SEC-003 · 사내 일반</a:t>
             </a:r>
           </a:p>
         </p:txBody>
@@ -22362,7 +22362,7 @@
                 <a:ea typeface="Malgun Gothic"/>
                 <a:cs typeface="Malgun Gothic"/>
               </a:rPr>
-              <a:t>© HANWHA SYSTEMS ICT · IT-SEC-003 · 사내 일반</a:t>
+              <a:t>© 가상 ICT 기업 · IT-SEC-003 · 사내 일반</a:t>
             </a:r>
           </a:p>
         </p:txBody>
@@ -24191,7 +24191,7 @@
                 <a:ea typeface="Malgun Gothic"/>
                 <a:cs typeface="Malgun Gothic"/>
               </a:rPr>
-              <a:t>© HANWHA SYSTEMS ICT · IT-SEC-003 · 사내 일반</a:t>
+              <a:t>© 가상 ICT 기업 · IT-SEC-003 · 사내 일반</a:t>
             </a:r>
           </a:p>
         </p:txBody>
@@ -25741,7 +25741,7 @@
                 <a:ea typeface="Malgun Gothic"/>
                 <a:cs typeface="Malgun Gothic"/>
               </a:rPr>
-              <a:t>© HANWHA SYSTEMS ICT · IT-SEC-003 · 사내 일반</a:t>
+              <a:t>© 가상 ICT 기업 · IT-SEC-003 · 사내 일반</a:t>
             </a:r>
           </a:p>
         </p:txBody>
@@ -27876,7 +27876,7 @@
                 <a:ea typeface="Malgun Gothic"/>
                 <a:cs typeface="Malgun Gothic"/>
               </a:rPr>
-              <a:t>© HANWHA SYSTEMS ICT · IT-SEC-003 · 사내 일반</a:t>
+              <a:t>© 가상 ICT 기업 · IT-SEC-003 · 사내 일반</a:t>
             </a:r>
           </a:p>
         </p:txBody>
@@ -29288,7 +29288,7 @@
                 <a:ea typeface="Malgun Gothic"/>
                 <a:cs typeface="Malgun Gothic"/>
               </a:rPr>
-              <a:t>© HANWHA SYSTEMS ICT · IT-SEC-003 · 사내 일반</a:t>
+              <a:t>© 가상 ICT 기업 · IT-SEC-003 · 사내 일반</a:t>
             </a:r>
           </a:p>
         </p:txBody>
@@ -31412,7 +31412,7 @@
                 <a:ea typeface="Malgun Gothic"/>
                 <a:cs typeface="Malgun Gothic"/>
               </a:rPr>
-              <a:t>© HANWHA SYSTEMS ICT · IT-SEC-003 · 사내 일반</a:t>
+              <a:t>© 가상 ICT 기업 · IT-SEC-003 · 사내 일반</a:t>
             </a:r>
           </a:p>
         </p:txBody>
@@ -32962,7 +32962,7 @@
                 <a:ea typeface="Malgun Gothic"/>
                 <a:cs typeface="Malgun Gothic"/>
               </a:rPr>
-              <a:t>© HANWHA SYSTEMS ICT · IT-SEC-003 · 사내 일반</a:t>
+              <a:t>© 가상 ICT 기업 · IT-SEC-003 · 사내 일반</a:t>
             </a:r>
           </a:p>
         </p:txBody>
@@ -33210,7 +33210,7 @@
                 <a:ea typeface="Malgun Gothic"/>
                 <a:cs typeface="Malgun Gothic"/>
               </a:rPr>
-              <a:t>© HANWHA SYSTEMS ICT · IT-SEC-003 · 사내 일반</a:t>
+              <a:t>© 가상 ICT 기업 · IT-SEC-003 · 사내 일반</a:t>
             </a:r>
           </a:p>
         </p:txBody>
@@ -34103,7 +34103,7 @@
                 <a:ea typeface="Malgun Gothic"/>
                 <a:cs typeface="Malgun Gothic"/>
               </a:rPr>
-              <a:t>© HANWHA SYSTEMS ICT · IT-SEC-003 · 사내 일반</a:t>
+              <a:t>© 가상 ICT 기업 · IT-SEC-003 · 사내 일반</a:t>
             </a:r>
           </a:p>
         </p:txBody>
@@ -34351,7 +34351,7 @@
                 <a:ea typeface="Malgun Gothic"/>
                 <a:cs typeface="Malgun Gothic"/>
               </a:rPr>
-              <a:t>© HANWHA SYSTEMS ICT · IT-SEC-003 · 사내 일반</a:t>
+              <a:t>© 가상 ICT 기업 · IT-SEC-003 · 사내 일반</a:t>
             </a:r>
           </a:p>
         </p:txBody>
@@ -35196,7 +35196,7 @@
                 <a:ea typeface="Malgun Gothic"/>
                 <a:cs typeface="Malgun Gothic"/>
               </a:rPr>
-              <a:t>© HANWHA SYSTEMS ICT · IT-SEC-003 · 사내 일반</a:t>
+              <a:t>© 가상 ICT 기업 · IT-SEC-003 · 사내 일반</a:t>
             </a:r>
           </a:p>
         </p:txBody>
@@ -35444,7 +35444,7 @@
                 <a:ea typeface="Malgun Gothic"/>
                 <a:cs typeface="Malgun Gothic"/>
               </a:rPr>
-              <a:t>© HANWHA SYSTEMS ICT · IT-SEC-003 · 사내 일반</a:t>
+              <a:t>© 가상 ICT 기업 · IT-SEC-003 · 사내 일반</a:t>
             </a:r>
           </a:p>
         </p:txBody>
@@ -36720,7 +36720,7 @@
                 <a:ea typeface="Malgun Gothic"/>
                 <a:cs typeface="Malgun Gothic"/>
               </a:rPr>
-              <a:t>© HANWHA SYSTEMS ICT · IT-SEC-003 · 사내 일반</a:t>
+              <a:t>© 가상 ICT 기업 · IT-SEC-003 · 사내 일반</a:t>
             </a:r>
           </a:p>
         </p:txBody>
@@ -37232,7 +37232,7 @@
                           <a:ea typeface="Malgun Gothic"/>
                           <a:cs typeface="Malgun Gothic"/>
                         </a:rPr>
-                        <a:t>사내 IT 포털(hanwha-admin) 상단 [챗봇 문의]</a:t>
+                        <a:t>사내 IT 포털 상단 [챗봇 문의]</a:t>
                       </a:r>
                     </a:p>
                   </a:txBody>
@@ -37924,7 +37924,7 @@
                           <a:ea typeface="Malgun Gothic"/>
                           <a:cs typeface="Malgun Gothic"/>
                         </a:rPr>
-                        <a:t>it-helpdesk@hanwha-ict.example</a:t>
+                        <a:t>it-helpdesk@ict.example</a:t>
                       </a:r>
                     </a:p>
                   </a:txBody>
@@ -38223,7 +38223,7 @@
                 <a:ea typeface="Malgun Gothic"/>
                 <a:cs typeface="Malgun Gothic"/>
               </a:rPr>
-              <a:t>© HANWHA SYSTEMS ICT · IT-SEC-003 · 사내 일반</a:t>
+              <a:t>© 가상 ICT 기업 · IT-SEC-003 · 사내 일반</a:t>
             </a:r>
           </a:p>
         </p:txBody>
@@ -38471,7 +38471,7 @@
                 <a:ea typeface="Malgun Gothic"/>
                 <a:cs typeface="Malgun Gothic"/>
               </a:rPr>
-              <a:t>© HANWHA SYSTEMS ICT · IT-SEC-003 · 사내 일반</a:t>
+              <a:t>© 가상 ICT 기업 · IT-SEC-003 · 사내 일반</a:t>
             </a:r>
           </a:p>
         </p:txBody>
@@ -40854,7 +40854,7 @@
                 <a:ea typeface="Malgun Gothic"/>
                 <a:cs typeface="Malgun Gothic"/>
               </a:rPr>
-              <a:t>© HANWHA SYSTEMS ICT · IT-SEC-003 · 사내 일반</a:t>
+              <a:t>© 가상 ICT 기업 · IT-SEC-003 · 사내 일반</a:t>
             </a:r>
           </a:p>
         </p:txBody>
@@ -41831,7 +41831,7 @@
                 <a:ea typeface="Malgun Gothic"/>
                 <a:cs typeface="Malgun Gothic"/>
               </a:rPr>
-              <a:t>© HANWHA SYSTEMS ICT · IT-SEC-003 · 사내 일반</a:t>
+              <a:t>© 가상 ICT 기업 · IT-SEC-003 · 사내 일반</a:t>
             </a:r>
           </a:p>
         </p:txBody>
@@ -42079,7 +42079,7 @@
                 <a:ea typeface="Malgun Gothic"/>
                 <a:cs typeface="Malgun Gothic"/>
               </a:rPr>
-              <a:t>© HANWHA SYSTEMS ICT · IT-SEC-003 · 사내 일반</a:t>
+              <a:t>© 가상 ICT 기업 · IT-SEC-003 · 사내 일반</a:t>
             </a:r>
           </a:p>
         </p:txBody>
@@ -43934,7 +43934,7 @@
                 <a:ea typeface="Malgun Gothic"/>
                 <a:cs typeface="Malgun Gothic"/>
               </a:rPr>
-              <a:t>© HANWHA SYSTEMS ICT · IT-SEC-003 · 사내 일반</a:t>
+              <a:t>© 가상 ICT 기업 · IT-SEC-003 · 사내 일반</a:t>
             </a:r>
           </a:p>
         </p:txBody>
@@ -44182,7 +44182,7 @@
                 <a:ea typeface="Malgun Gothic"/>
                 <a:cs typeface="Malgun Gothic"/>
               </a:rPr>
-              <a:t>© HANWHA SYSTEMS ICT · IT-SEC-003 · 사내 일반</a:t>
+              <a:t>© 가상 ICT 기업 · IT-SEC-003 · 사내 일반</a:t>
             </a:r>
           </a:p>
         </p:txBody>
@@ -44885,7 +44885,7 @@
                 <a:ea typeface="Malgun Gothic"/>
                 <a:cs typeface="Malgun Gothic"/>
               </a:rPr>
-              <a:t>비밀번호를 바꿀 때는 비밀번호 재설정 포털(password.hanwha-ict.example) 주소를 직접 입력합니다.</a:t>
+              <a:t>비밀번호를 바꿀 때는 비밀번호 재설정 포털(password.ict.example) 주소를 직접 입력합니다.</a:t>
             </a:r>
           </a:p>
         </p:txBody>
@@ -45909,7 +45909,7 @@
                 <a:ea typeface="Malgun Gothic"/>
                 <a:cs typeface="Malgun Gothic"/>
               </a:rPr>
-              <a:t>© HANWHA SYSTEMS ICT · IT-SEC-003 · 사내 일반</a:t>
+              <a:t>© 가상 ICT 기업 · IT-SEC-003 · 사내 일반</a:t>
             </a:r>
           </a:p>
         </p:txBody>
@@ -47769,7 +47769,7 @@
                 <a:ea typeface="Malgun Gothic"/>
                 <a:cs typeface="Malgun Gothic"/>
               </a:rPr>
-              <a:t>© HANWHA SYSTEMS ICT · IT-SEC-003 · 사내 일반</a:t>
+              <a:t>© 가상 ICT 기업 · IT-SEC-003 · 사내 일반</a:t>
             </a:r>
           </a:p>
         </p:txBody>
@@ -48017,7 +48017,7 @@
                 <a:ea typeface="Malgun Gothic"/>
                 <a:cs typeface="Malgun Gothic"/>
               </a:rPr>
-              <a:t>© HANWHA SYSTEMS ICT · IT-SEC-003 · 사내 일반</a:t>
+              <a:t>© 가상 ICT 기업 · IT-SEC-003 · 사내 일반</a:t>
             </a:r>
           </a:p>
         </p:txBody>
